--- a/presentation/cpp-concurrency-201-low-latency.pptx
+++ b/presentation/cpp-concurrency-201-low-latency.pptx
@@ -564,13 +564,13 @@
           <a:p>
             <a:r>
               <a:rPr sz="1200"/>
-              <a:t>This is the 201 deck — the low-latency and high-throughput deep dive for senior and staff engineers building matching engines, feed handlers, and other systems where single-digit microseconds are the budget, not an aspiration. Where an introductory deck explains what a thread is, this one assumes that and goes straight at NUMA placement, false sharing, the Disruptor pattern, and a capstone pipeline that composes all of it under load.</a:t>
+              <a:t>This is the 201 deck — the low-latency and high-throughput deep dive for senior and staff engineers building matching engines, feed handlers, and other systems where single-digit microseconds are the budget, not an aspiration. Where an introductory deck explains what a thread is, this one assumes that and goes straight at NUMA placement, false sharing, the Disruptor pattern, and a full pipeline that composes all of it under load.</a:t>
             </a:r>
           </a:p>
           <a:p>
             <a:r>
               <a:rPr sz="1200"/>
-              <a:t>The spine is fourteen sections built from chapters 16 through 33 of the book: locality and vectorization, the benchmarking discipline that makes every later performance claim trustworthy, the fast path and mechanical sympathy, lock-free messaging, communication models and the actor model, concurrent REST and gRPC under load, error handling across thread boundaries, debugging and sanitizers, observability, coding practices and architecture patterns, running correctly in a container, and a capstone order-book pipeline that ties the whole arc together.</a:t>
+              <a:t>The spine is fourteen sections built from chapters 16 through 33 of the book: locality and vectorization, the benchmarking discipline that makes every later performance claim trustworthy, the fast path and mechanical sympathy, lock-free messaging, communication models and the actor model, concurrent REST and gRPC under load, error handling across thread boundaries, debugging and sanitizers, observability, coding practices and architecture patterns, running correctly in a container, and a full end-to-end example order-book pipeline that ties the whole arc together.</a:t>
             </a:r>
           </a:p>
           <a:p>
@@ -1411,7 +1411,7 @@
           <a:p>
             <a:r>
               <a:rPr sz="1200"/>
-              <a:t>Section fourteen closes with the capstone: a single ingest-match-publish pipeline that composes a thread pool, a pinned single-writer thread, lock-free rings, and full tracing into one measured system, proving the earlier sections' individually-true claims hold up stacked together. Eight sections pause on a demo cue where the pattern has a runnable companion.</a:t>
+              <a:t>Section fourteen closes with the full example: a single ingest-match-publish pipeline that composes a thread pool, a pinned single-writer thread, lock-free rings, and full tracing into one measured system, proving the earlier sections' individually-true claims hold up stacked together. Eight sections pause on a demo cue where the pattern has a runnable companion.</a:t>
             </a:r>
           </a:p>
         </p:txBody>
@@ -4964,13 +4964,13 @@
           <a:p>
             <a:r>
               <a:rPr sz="1200"/>
-              <a:t>To close: every pattern in this deck, from first-touch NUMA placement to the capstone's pinned single-writer match thread, is backed by a runnable example under examples/concurrency/, and none of the performance claims in this deck are presented as the book's own measurement — the hardware a reader runs these on produces the real figures.</a:t>
+              <a:t>To close: every pattern in this deck, from first-touch NUMA placement to the full example's pinned single-writer match thread, is backed by a runnable example under examples/concurrency/, and none of the performance claims in this deck are presented as the book's own measurement — the hardware a reader runs these on produces the real figures.</a:t>
             </a:r>
           </a:p>
           <a:p>
             <a:r>
               <a:rPr sz="1200"/>
-              <a:t>The arc holds together end to end: a trustworthy benchmark makes every other number in the book meaningful, mechanical sympathy and lock-free messaging turn that discipline into a fast path, and the capstone pipeline proves the individually-true claims from every earlier section still hold once they are stacked into one system under real load. Clone the repo, run the demos, and measure your own hardware. Thank you.</a:t>
+              <a:t>The arc holds together end to end: a trustworthy benchmark makes every other number in the book meaningful, mechanical sympathy and lock-free messaging turn that discipline into a fast path, and the full pipeline proves the individually-true claims from every earlier section still hold once they are stacked into one system under real load. Clone the repo, run the demos, and measure your own hardware. Thank you.</a:t>
             </a:r>
           </a:p>
         </p:txBody>
@@ -8439,7 +8439,7 @@
                 </a:solidFill>
                 <a:latin typeface="Red Hat Text"/>
               </a:rPr>
-              <a:t>NUMA and SIMD  •  benchmarking without deception  •  false sharing  •  the Disruptor  •  observability  •  the capstone pipeline</a:t>
+              <a:t>NUMA and SIMD  •  benchmarking without deception  •  false sharing  •  the Disruptor  •  observability  •  the full pipeline</a:t>
             </a:r>
           </a:p>
         </p:txBody>
@@ -14201,7 +14201,7 @@
                 </a:solidFill>
                 <a:latin typeface="Red Hat Text"/>
               </a:rPr>
-              <a:t>Capstone: ingest, match, publish</a:t>
+              <a:t>Full example: ingest, match, publish</a:t>
             </a:r>
           </a:p>
         </p:txBody>
@@ -30364,7 +30364,7 @@
                 </a:solidFill>
                 <a:latin typeface="Red Hat Display"/>
               </a:rPr>
-              <a:t>Capstone: ingest, match, publish</a:t>
+              <a:t>Full example: ingest, match, publish</a:t>
             </a:r>
           </a:p>
         </p:txBody>
@@ -30538,7 +30538,7 @@
                 </a:solidFill>
                 <a:latin typeface="Red Hat Display"/>
               </a:rPr>
-              <a:t>Capstone: ingest, match, publish</a:t>
+              <a:t>Full example: ingest, match, publish</a:t>
             </a:r>
           </a:p>
         </p:txBody>
@@ -30653,7 +30653,7 @@
                 </a:solidFill>
                 <a:latin typeface="Red Hat Text"/>
               </a:rPr>
-              <a:t>C++ Concurrency 201   |   Capstone: ingest, match, publish</a:t>
+              <a:t>C++ Concurrency 201   |   Full example: ingest, match, publish</a:t>
             </a:r>
           </a:p>
         </p:txBody>
@@ -30886,7 +30886,7 @@
                 </a:solidFill>
                 <a:latin typeface="Red Hat Display"/>
               </a:rPr>
-              <a:t>Capstone: ingest, match, publish</a:t>
+              <a:t>Full example: ingest, match, publish</a:t>
             </a:r>
           </a:p>
         </p:txBody>
@@ -31001,7 +31001,7 @@
                 </a:solidFill>
                 <a:latin typeface="Red Hat Text"/>
               </a:rPr>
-              <a:t>C++ Concurrency 201   |   Capstone: ingest, match, publish</a:t>
+              <a:t>C++ Concurrency 201   |   Full example: ingest, match, publish</a:t>
             </a:r>
           </a:p>
         </p:txBody>
@@ -31852,7 +31852,7 @@
                 </a:solidFill>
                 <a:latin typeface="Red Hat Display"/>
               </a:rPr>
-              <a:t>Capstone: ingest, match, publish</a:t>
+              <a:t>Full example: ingest, match, publish</a:t>
             </a:r>
           </a:p>
         </p:txBody>
@@ -31967,7 +31967,7 @@
                 </a:solidFill>
                 <a:latin typeface="Red Hat Text"/>
               </a:rPr>
-              <a:t>C++ Concurrency 201   |   Capstone: ingest, match, publish</a:t>
+              <a:t>C++ Concurrency 201   |   Full example: ingest, match, publish</a:t>
             </a:r>
           </a:p>
         </p:txBody>
@@ -32487,7 +32487,7 @@
                 </a:solidFill>
                 <a:latin typeface="Red Hat Text"/>
               </a:rPr>
-              <a:t>Runs capstone_pipeline once and checks that no accepted order was lost or duplicated through either ring, that the order book's own conservation counters balance, that match really is single-threaded, that the overload burst engaged back-pressure, and that p50/p99/p99.9 figures are present.</a:t>
+              <a:t>Runs pipeline once and checks that no accepted order was lost or duplicated through either ring, that the order book's own conservation counters balance, that match really is single-threaded, that the overload burst engaged back-pressure, and that p50/p99/p99.9 figures are present.</a:t>
             </a:r>
           </a:p>
         </p:txBody>
@@ -32565,7 +32565,7 @@
                 </a:solidFill>
                 <a:latin typeface="Red Hat Mono"/>
               </a:rPr>
-              <a:t>$ cd examples/concurrency/33-capstone-ingest-match-publish &amp;&amp; ./demo.sh</a:t>
+              <a:t>$ cd examples/concurrency/33-ingest-match-publish &amp;&amp; ./demo.sh</a:t>
             </a:r>
           </a:p>
         </p:txBody>
@@ -32600,7 +32600,7 @@
                 </a:solidFill>
                 <a:latin typeface="Red Hat Mono"/>
               </a:rPr>
-              <a:t>  source on site: github.com/patterncatalyst/cpp-concurrency-and-parallelism/tree/main/examples/concurrency/33-capstone-ingest-match-publish</a:t>
+              <a:t>  source on site: github.com/patterncatalyst/cpp-concurrency-and-parallelism/tree/main/examples/concurrency/33-ingest-match-publish</a:t>
             </a:r>
           </a:p>
         </p:txBody>
@@ -32773,7 +32773,7 @@
                 </a:solidFill>
                 <a:latin typeface="Red Hat Text"/>
               </a:rPr>
-              <a:t>The capstone pipeline composes all of it, measured under load — and eight demos across this deck are where a reader's own hardware produces the real numbers.</a:t>
+              <a:t>The full pipeline composes all of it, measured under load — and eight demos across this deck are where a reader's own hardware produces the real numbers.</a:t>
             </a:r>
           </a:p>
         </p:txBody>

--- a/presentation/cpp-concurrency-201-low-latency.pptx
+++ b/presentation/cpp-concurrency-201-low-latency.pptx
@@ -67,6 +67,7 @@
     <p:sldId id="315" r:id="rId67"/>
     <p:sldId id="316" r:id="rId68"/>
     <p:sldId id="317" r:id="rId69"/>
+    <p:sldId id="318" r:id="rId70"/>
   </p:sldIdLst>
   <p:sldSz cx="12191695" cy="6858000" type="screen4x3"/>
   <p:notesSz cx="6858000" cy="9144000"/>
@@ -32848,6 +32849,428 @@
           </a:p>
         </p:txBody>
       </p:sp>
+    </p:spTree>
+  </p:cSld>
+  <p:clrMapOvr>
+    <a:masterClrMapping/>
+  </p:clrMapOvr>
+</p:sld>
+</file>
+
+<file path=ppt/slides/slide63.xml><?xml version="1.0" encoding="utf-8"?>
+<p:sld xmlns:a="http://schemas.openxmlformats.org/drawingml/2006/main" xmlns:p="http://schemas.openxmlformats.org/presentationml/2006/main" xmlns:r="http://schemas.openxmlformats.org/officeDocument/2006/relationships">
+  <p:bg>
+    <p:bgPr>
+      <a:solidFill>
+        <a:srgbClr val="FFFFFF"/>
+      </a:solidFill>
+      <a:effectLst/>
+    </p:bgPr>
+  </p:bg>
+  <p:cSld>
+    <p:spTree>
+      <p:nvGrpSpPr>
+        <p:cNvPr id="1" name=""/>
+        <p:cNvGrpSpPr/>
+        <p:nvPr/>
+      </p:nvGrpSpPr>
+      <p:grpSpPr/>
+      <p:sp>
+        <p:nvSpPr>
+          <p:cNvPr id="2" name="TextBox 1"/>
+          <p:cNvSpPr txBox="1"/>
+          <p:nvPr/>
+        </p:nvSpPr>
+        <p:spPr>
+          <a:xfrm>
+            <a:off x="566927" y="384047"/>
+            <a:ext cx="11055095" cy="292607"/>
+          </a:xfrm>
+          <a:prstGeom prst="rect">
+            <a:avLst/>
+          </a:prstGeom>
+          <a:noFill/>
+        </p:spPr>
+        <p:txBody>
+          <a:bodyPr wrap="square" lIns="0" rIns="0" tIns="0" bIns="0" anchor="ctr">
+            <a:spAutoFit/>
+          </a:bodyPr>
+          <a:lstStyle/>
+          <a:p>
+            <a:pPr algn="l"/>
+            <a:r>
+              <a:rPr sz="1199" b="1" i="0" spc="399">
+                <a:solidFill>
+                  <a:srgbClr val="EE0000"/>
+                </a:solidFill>
+                <a:latin typeface="Overpass"/>
+                <a:cs typeface="Overpass"/>
+              </a:rPr>
+              <a:t>SCAN TO EXPLORE</a:t>
+            </a:r>
+          </a:p>
+        </p:txBody>
+      </p:sp>
+      <p:sp>
+        <p:nvSpPr>
+          <p:cNvPr id="3" name="TextBox 2"/>
+          <p:cNvSpPr txBox="1"/>
+          <p:nvPr/>
+        </p:nvSpPr>
+        <p:spPr>
+          <a:xfrm>
+            <a:off x="566927" y="676655"/>
+            <a:ext cx="11055095" cy="1005839"/>
+          </a:xfrm>
+          <a:prstGeom prst="rect">
+            <a:avLst/>
+          </a:prstGeom>
+          <a:noFill/>
+        </p:spPr>
+        <p:txBody>
+          <a:bodyPr wrap="square" lIns="0" rIns="0" tIns="0" bIns="0" anchor="t">
+            <a:spAutoFit/>
+          </a:bodyPr>
+          <a:lstStyle/>
+          <a:p>
+            <a:pPr algn="l"/>
+            <a:r>
+              <a:rPr sz="2999" b="1" i="0">
+                <a:solidFill>
+                  <a:srgbClr val="151515"/>
+                </a:solidFill>
+                <a:latin typeface="Overpass"/>
+                <a:cs typeface="Overpass"/>
+              </a:rPr>
+              <a:t>Take it with you</a:t>
+            </a:r>
+          </a:p>
+        </p:txBody>
+      </p:sp>
+      <p:pic>
+        <p:nvPicPr>
+          <p:cNvPr id="4" name="Picture 3" descr="qr-cppc-site.png"/>
+          <p:cNvPicPr>
+            <a:picLocks noChangeAspect="1"/>
+          </p:cNvPicPr>
+          <p:nvPr/>
+        </p:nvPicPr>
+        <p:blipFill>
+          <a:blip r:embed="rId2"/>
+          <a:stretch>
+            <a:fillRect/>
+          </a:stretch>
+        </p:blipFill>
+        <p:spPr>
+          <a:xfrm>
+            <a:off x="2103119" y="1627631"/>
+            <a:ext cx="2834639" cy="2834639"/>
+          </a:xfrm>
+          <a:prstGeom prst="rect">
+            <a:avLst/>
+          </a:prstGeom>
+        </p:spPr>
+      </p:pic>
+      <p:sp>
+        <p:nvSpPr>
+          <p:cNvPr id="5" name="TextBox 4"/>
+          <p:cNvSpPr txBox="1"/>
+          <p:nvPr/>
+        </p:nvSpPr>
+        <p:spPr>
+          <a:xfrm>
+            <a:off x="1417319" y="4553711"/>
+            <a:ext cx="4206239" cy="365759"/>
+          </a:xfrm>
+          <a:prstGeom prst="rect">
+            <a:avLst/>
+          </a:prstGeom>
+          <a:noFill/>
+        </p:spPr>
+        <p:txBody>
+          <a:bodyPr wrap="square" lIns="0" rIns="0" tIns="0" bIns="0" anchor="ctr">
+            <a:spAutoFit/>
+          </a:bodyPr>
+          <a:lstStyle/>
+          <a:p>
+            <a:pPr algn="ctr"/>
+            <a:r>
+              <a:rPr sz="1799" b="1" i="0">
+                <a:solidFill>
+                  <a:srgbClr val="151515"/>
+                </a:solidFill>
+                <a:latin typeface="Overpass"/>
+                <a:cs typeface="Overpass"/>
+              </a:rPr>
+              <a:t>The site</a:t>
+            </a:r>
+          </a:p>
+        </p:txBody>
+      </p:sp>
+      <p:sp>
+        <p:nvSpPr>
+          <p:cNvPr id="6" name="TextBox 5"/>
+          <p:cNvSpPr txBox="1"/>
+          <p:nvPr/>
+        </p:nvSpPr>
+        <p:spPr>
+          <a:xfrm>
+            <a:off x="1325879" y="4937759"/>
+            <a:ext cx="4389119" cy="658367"/>
+          </a:xfrm>
+          <a:prstGeom prst="rect">
+            <a:avLst/>
+          </a:prstGeom>
+          <a:noFill/>
+        </p:spPr>
+        <p:txBody>
+          <a:bodyPr wrap="square" lIns="0" rIns="0" tIns="0" bIns="0" anchor="t">
+            <a:spAutoFit/>
+          </a:bodyPr>
+          <a:lstStyle/>
+          <a:p>
+            <a:pPr algn="ctr"/>
+            <a:r>
+              <a:rPr sz="1299" b="0" i="1">
+                <a:solidFill>
+                  <a:srgbClr val="5A5A5A"/>
+                </a:solidFill>
+                <a:latin typeface="Red Hat Text"/>
+                <a:cs typeface="Red Hat Text"/>
+              </a:rPr>
+              <a:t>Chapters, the runnable C++ examples, and the benchmarks</a:t>
+            </a:r>
+          </a:p>
+        </p:txBody>
+      </p:sp>
+      <p:sp>
+        <p:nvSpPr>
+          <p:cNvPr id="7" name="TextBox 6"/>
+          <p:cNvSpPr txBox="1"/>
+          <p:nvPr/>
+        </p:nvSpPr>
+        <p:spPr>
+          <a:xfrm>
+            <a:off x="1325879" y="5596127"/>
+            <a:ext cx="4389119" cy="292607"/>
+          </a:xfrm>
+          <a:prstGeom prst="rect">
+            <a:avLst/>
+          </a:prstGeom>
+          <a:noFill/>
+        </p:spPr>
+        <p:txBody>
+          <a:bodyPr wrap="square" lIns="0" rIns="0" tIns="0" bIns="0" anchor="ctr">
+            <a:spAutoFit/>
+          </a:bodyPr>
+          <a:lstStyle/>
+          <a:p>
+            <a:pPr algn="ctr"/>
+            <a:r>
+              <a:rPr sz="899" b="0" i="0">
+                <a:solidFill>
+                  <a:srgbClr val="EE0000"/>
+                </a:solidFill>
+                <a:latin typeface="Red Hat Mono"/>
+                <a:cs typeface="Red Hat Mono"/>
+              </a:rPr>
+              <a:t>patterncatalyst.github.io/cpp-concurrency-and-parallelism</a:t>
+            </a:r>
+          </a:p>
+        </p:txBody>
+      </p:sp>
+      <p:pic>
+        <p:nvPicPr>
+          <p:cNvPr id="8" name="Picture 7" descr="qr-hub.png"/>
+          <p:cNvPicPr>
+            <a:picLocks noChangeAspect="1"/>
+          </p:cNvPicPr>
+          <p:nvPr/>
+        </p:nvPicPr>
+        <p:blipFill>
+          <a:blip r:embed="rId3"/>
+          <a:stretch>
+            <a:fillRect/>
+          </a:stretch>
+        </p:blipFill>
+        <p:spPr>
+          <a:xfrm>
+            <a:off x="7251191" y="1627631"/>
+            <a:ext cx="2834639" cy="2834639"/>
+          </a:xfrm>
+          <a:prstGeom prst="rect">
+            <a:avLst/>
+          </a:prstGeom>
+        </p:spPr>
+      </p:pic>
+      <p:sp>
+        <p:nvSpPr>
+          <p:cNvPr id="9" name="TextBox 8"/>
+          <p:cNvSpPr txBox="1"/>
+          <p:nvPr/>
+        </p:nvSpPr>
+        <p:spPr>
+          <a:xfrm>
+            <a:off x="6565391" y="4553711"/>
+            <a:ext cx="4206239" cy="365759"/>
+          </a:xfrm>
+          <a:prstGeom prst="rect">
+            <a:avLst/>
+          </a:prstGeom>
+          <a:noFill/>
+        </p:spPr>
+        <p:txBody>
+          <a:bodyPr wrap="square" lIns="0" rIns="0" tIns="0" bIns="0" anchor="ctr">
+            <a:spAutoFit/>
+          </a:bodyPr>
+          <a:lstStyle/>
+          <a:p>
+            <a:pPr algn="ctr"/>
+            <a:r>
+              <a:rPr sz="1799" b="1" i="0">
+                <a:solidFill>
+                  <a:srgbClr val="151515"/>
+                </a:solidFill>
+                <a:latin typeface="Overpass"/>
+                <a:cs typeface="Overpass"/>
+              </a:rPr>
+              <a:t>Workshops &amp; Tutorials</a:t>
+            </a:r>
+          </a:p>
+        </p:txBody>
+      </p:sp>
+      <p:sp>
+        <p:nvSpPr>
+          <p:cNvPr id="10" name="TextBox 9"/>
+          <p:cNvSpPr txBox="1"/>
+          <p:nvPr/>
+        </p:nvSpPr>
+        <p:spPr>
+          <a:xfrm>
+            <a:off x="6473951" y="4937759"/>
+            <a:ext cx="4389119" cy="658367"/>
+          </a:xfrm>
+          <a:prstGeom prst="rect">
+            <a:avLst/>
+          </a:prstGeom>
+          <a:noFill/>
+        </p:spPr>
+        <p:txBody>
+          <a:bodyPr wrap="square" lIns="0" rIns="0" tIns="0" bIns="0" anchor="t">
+            <a:spAutoFit/>
+          </a:bodyPr>
+          <a:lstStyle/>
+          <a:p>
+            <a:pPr algn="ctr"/>
+            <a:r>
+              <a:rPr sz="1299" b="0" i="1">
+                <a:solidFill>
+                  <a:srgbClr val="5A5A5A"/>
+                </a:solidFill>
+                <a:latin typeface="Red Hat Text"/>
+                <a:cs typeface="Red Hat Text"/>
+              </a:rPr>
+              <a:t>The whole series: every workshop, tutorial, and deck in one place</a:t>
+            </a:r>
+          </a:p>
+        </p:txBody>
+      </p:sp>
+      <p:sp>
+        <p:nvSpPr>
+          <p:cNvPr id="11" name="TextBox 10"/>
+          <p:cNvSpPr txBox="1"/>
+          <p:nvPr/>
+        </p:nvSpPr>
+        <p:spPr>
+          <a:xfrm>
+            <a:off x="6473951" y="5596127"/>
+            <a:ext cx="4389119" cy="292607"/>
+          </a:xfrm>
+          <a:prstGeom prst="rect">
+            <a:avLst/>
+          </a:prstGeom>
+          <a:noFill/>
+        </p:spPr>
+        <p:txBody>
+          <a:bodyPr wrap="square" lIns="0" rIns="0" tIns="0" bIns="0" anchor="ctr">
+            <a:spAutoFit/>
+          </a:bodyPr>
+          <a:lstStyle/>
+          <a:p>
+            <a:pPr algn="ctr"/>
+            <a:r>
+              <a:rPr sz="899" b="0" i="0">
+                <a:solidFill>
+                  <a:srgbClr val="EE0000"/>
+                </a:solidFill>
+                <a:latin typeface="Red Hat Mono"/>
+                <a:cs typeface="Red Hat Mono"/>
+              </a:rPr>
+              <a:t>patterncatalyst.github.io/patterncatalyst-workshops-tutorials-list</a:t>
+            </a:r>
+          </a:p>
+        </p:txBody>
+      </p:sp>
+      <p:sp>
+        <p:nvSpPr>
+          <p:cNvPr id="12" name="TextBox 11"/>
+          <p:cNvSpPr txBox="1"/>
+          <p:nvPr/>
+        </p:nvSpPr>
+        <p:spPr>
+          <a:xfrm>
+            <a:off x="566927" y="6364223"/>
+            <a:ext cx="914399" cy="274319"/>
+          </a:xfrm>
+          <a:prstGeom prst="rect">
+            <a:avLst/>
+          </a:prstGeom>
+          <a:noFill/>
+        </p:spPr>
+        <p:txBody>
+          <a:bodyPr wrap="square" lIns="0" rIns="0" tIns="0" bIns="0" anchor="ctr">
+            <a:spAutoFit/>
+          </a:bodyPr>
+          <a:lstStyle/>
+          <a:p>
+            <a:pPr algn="l"/>
+            <a:r>
+              <a:rPr sz="999" b="0" i="0">
+                <a:solidFill>
+                  <a:srgbClr val="8A8A8A"/>
+                </a:solidFill>
+                <a:latin typeface="Red Hat Text"/>
+                <a:cs typeface="Red Hat Text"/>
+              </a:rPr>
+              <a:t>63</a:t>
+            </a:r>
+          </a:p>
+        </p:txBody>
+      </p:sp>
+      <p:pic>
+        <p:nvPicPr>
+          <p:cNvPr id="13" name="Picture 12" descr="logo-candidate-2.png"/>
+          <p:cNvPicPr>
+            <a:picLocks noChangeAspect="1"/>
+          </p:cNvPicPr>
+          <p:nvPr/>
+        </p:nvPicPr>
+        <p:blipFill>
+          <a:blip r:embed="rId4"/>
+          <a:stretch>
+            <a:fillRect/>
+          </a:stretch>
+        </p:blipFill>
+        <p:spPr>
+          <a:xfrm>
+            <a:off x="10561319" y="6355079"/>
+            <a:ext cx="1033271" cy="246887"/>
+          </a:xfrm>
+          <a:prstGeom prst="rect">
+            <a:avLst/>
+          </a:prstGeom>
+        </p:spPr>
+      </p:pic>
     </p:spTree>
   </p:cSld>
   <p:clrMapOvr>
